--- a/fadori/presentacion/Fadori-STEAM.pptx
+++ b/fadori/presentacion/Fadori-STEAM.pptx
@@ -3453,8 +3453,8 @@
         </p:nvSpPr>
         <p:spPr>
           <a:xfrm rot="0">
-            <a:off x="3768300" y="5528567"/>
-            <a:ext cx="10210800" cy="1407781"/>
+            <a:off x="1216152" y="4526280"/>
+            <a:ext cx="14712696" cy="1463040"/>
           </a:xfrm>
           <a:prstGeom prst="rect">
             <a:avLst/>
@@ -3525,8 +3525,8 @@
         </p:nvSpPr>
         <p:spPr>
           <a:xfrm rot="0">
-            <a:off x="3768300" y="8127553"/>
-            <a:ext cx="2811214" cy="1918496"/>
+            <a:off x="4206240" y="7223760"/>
+            <a:ext cx="10972800" cy="2743200"/>
           </a:xfrm>
           <a:prstGeom prst="rect">
             <a:avLst/>
@@ -3661,8 +3661,8 @@
         </p:nvSpPr>
         <p:spPr>
           <a:xfrm rot="0">
-            <a:off x="4215265" y="3785128"/>
-            <a:ext cx="9050685" cy="815035"/>
+            <a:off x="1216152" y="3310128"/>
+            <a:ext cx="14712696" cy="914400"/>
           </a:xfrm>
           <a:prstGeom prst="rect">
             <a:avLst/>
@@ -3680,7 +3680,7 @@
               </a:lnSpc>
             </a:pPr>
             <a:r>
-              <a:rPr lang="en-US" sz="5678" b="true">
+              <a:rPr lang="en-US" sz="4400" b="true">
                 <a:solidFill>
                   <a:srgbClr val="AD0F0F"/>
                 </a:solidFill>
@@ -3692,7 +3692,7 @@
               <a:t>B</a:t>
             </a:r>
             <a:r>
-              <a:rPr lang="en-US" sz="5678" b="true">
+              <a:rPr lang="en-US" sz="4400" b="true">
                 <a:solidFill>
                   <a:srgbClr val="07416B"/>
                 </a:solidFill>
@@ -3704,7 +3704,7 @@
               <a:t>achillerato</a:t>
             </a:r>
             <a:r>
-              <a:rPr lang="en-US" sz="5678" b="true">
+              <a:rPr lang="en-US" sz="4400" b="true">
                 <a:solidFill>
                   <a:srgbClr val="AD0F0F"/>
                 </a:solidFill>
@@ -3716,7 +3716,7 @@
               <a:t> R</a:t>
             </a:r>
             <a:r>
-              <a:rPr lang="en-US" sz="5678" b="true">
+              <a:rPr lang="en-US" sz="4400" b="true">
                 <a:solidFill>
                   <a:srgbClr val="07416B"/>
                 </a:solidFill>
@@ -3738,8 +3738,8 @@
         </p:nvSpPr>
         <p:spPr>
           <a:xfrm rot="0">
-            <a:off x="1219200" y="2817914"/>
-            <a:ext cx="14708535" cy="815035"/>
+            <a:off x="1216152" y="2286000"/>
+            <a:ext cx="14712696" cy="914400"/>
           </a:xfrm>
           <a:prstGeom prst="rect">
             <a:avLst/>
@@ -3757,7 +3757,7 @@
               </a:lnSpc>
             </a:pPr>
             <a:r>
-              <a:rPr lang="en-US" sz="5678" b="true">
+              <a:rPr lang="en-US" sz="4400" b="true">
                 <a:solidFill>
                   <a:srgbClr val="AD0F0F"/>
                 </a:solidFill>
@@ -3769,7 +3769,7 @@
               <a:t>I</a:t>
             </a:r>
             <a:r>
-              <a:rPr lang="en-US" sz="5678" b="true">
+              <a:rPr lang="en-US" sz="4400" b="true">
                 <a:solidFill>
                   <a:srgbClr val="07416B"/>
                 </a:solidFill>
@@ -3781,7 +3781,7 @@
               <a:t>nstituto </a:t>
             </a:r>
             <a:r>
-              <a:rPr lang="en-US" sz="5678" b="true">
+              <a:rPr lang="en-US" sz="4400" b="true">
                 <a:solidFill>
                   <a:srgbClr val="AD0F0F"/>
                 </a:solidFill>
@@ -3793,7 +3793,7 @@
               <a:t>T</a:t>
             </a:r>
             <a:r>
-              <a:rPr lang="en-US" sz="5678" b="true">
+              <a:rPr lang="en-US" sz="4400" b="true">
                 <a:solidFill>
                   <a:srgbClr val="07416B"/>
                 </a:solidFill>
@@ -3805,7 +3805,7 @@
               <a:t>ecnológico en </a:t>
             </a:r>
             <a:r>
-              <a:rPr lang="en-US" sz="5678" b="true">
+              <a:rPr lang="en-US" sz="4400" b="true">
                 <a:solidFill>
                   <a:srgbClr val="AD0F0F"/>
                 </a:solidFill>
@@ -3817,7 +3817,7 @@
               <a:t>P</a:t>
             </a:r>
             <a:r>
-              <a:rPr lang="en-US" sz="5678" b="true">
+              <a:rPr lang="en-US" sz="4400" b="true">
                 <a:solidFill>
                   <a:srgbClr val="07416B"/>
                 </a:solidFill>
@@ -3839,8 +3839,8 @@
         </p:nvSpPr>
         <p:spPr>
           <a:xfrm rot="0">
-            <a:off x="3857482" y="7253158"/>
-            <a:ext cx="715566" cy="836295"/>
+            <a:off x="1216152" y="6355080"/>
+            <a:ext cx="14712696" cy="822960"/>
           </a:xfrm>
           <a:prstGeom prst="rect">
             <a:avLst/>
@@ -3915,8 +3915,8 @@
         </p:nvSpPr>
         <p:spPr>
           <a:xfrm rot="0">
-            <a:off x="2618316" y="3379108"/>
-            <a:ext cx="8681874" cy="6522910"/>
+            <a:off x="2615184" y="3840480"/>
+            <a:ext cx="12801600" cy="2377440"/>
           </a:xfrm>
           <a:prstGeom prst="rect">
             <a:avLst/>
@@ -4305,8 +4305,8 @@
         </p:nvSpPr>
         <p:spPr>
           <a:xfrm rot="0">
-            <a:off x="4273792" y="1051781"/>
-            <a:ext cx="10478095" cy="2204720"/>
+            <a:off x="3840480" y="914400"/>
+            <a:ext cx="11338560" cy="2203704"/>
           </a:xfrm>
           <a:prstGeom prst="rect">
             <a:avLst/>
@@ -4324,7 +4324,7 @@
               </a:lnSpc>
             </a:pPr>
             <a:r>
-              <a:rPr lang="en-US" sz="9200" b="true">
+              <a:rPr lang="en-US" sz="6200" b="true">
                 <a:solidFill>
                   <a:srgbClr val="FFFFFF"/>
                 </a:solidFill>
@@ -4605,8 +4605,8 @@
         </p:nvSpPr>
         <p:spPr>
           <a:xfrm rot="0">
-            <a:off x="5693639" y="588142"/>
-            <a:ext cx="7730430" cy="1566544"/>
+            <a:off x="1737360" y="777240"/>
+            <a:ext cx="14813280" cy="1417320"/>
           </a:xfrm>
           <a:prstGeom prst="rect">
             <a:avLst/>
@@ -4624,7 +4624,7 @@
               </a:lnSpc>
             </a:pPr>
             <a:r>
-              <a:rPr lang="en-US" sz="9200" b="true">
+              <a:rPr lang="en-US" sz="6200" b="true">
                 <a:solidFill>
                   <a:srgbClr val="FFFFFF"/>
                 </a:solidFill>
@@ -4646,8 +4646,8 @@
         </p:nvSpPr>
         <p:spPr>
           <a:xfrm rot="0">
-            <a:off x="1463040" y="3749039"/>
-            <a:ext cx="6949440" cy="2926080"/>
+            <a:off x="1737360" y="3017520"/>
+            <a:ext cx="7406640" cy="2377440"/>
           </a:xfrm>
           <a:prstGeom prst="rect">
             <a:avLst/>
@@ -4659,13 +4659,13 @@
           </a:bodyPr>
           <a:lstStyle/>
           <a:p>
-            <a:pPr algn="ctr">
+            <a:pPr algn="l">
               <a:lnSpc>
                 <a:spcPts val="8854"/>
               </a:lnSpc>
             </a:pPr>
             <a:r>
-              <a:rPr lang="en-US" b="true" sz="4449">
+              <a:rPr lang="en-US" b="true" sz="3000">
                 <a:solidFill>
                   <a:srgbClr val="FFFFFF"/>
                 </a:solidFill>
@@ -4695,8 +4695,8 @@
         </p:blipFill>
         <p:spPr>
           <a:xfrm>
-            <a:off x="11934436" y="2377440"/>
-            <a:ext cx="3380246" cy="7315200"/>
+            <a:off x="12230208" y="3291840"/>
+            <a:ext cx="2788703" cy="6035040"/>
           </a:xfrm>
           <a:prstGeom prst="rect">
             <a:avLst/>
@@ -4956,8 +4956,8 @@
         </p:nvSpPr>
         <p:spPr>
           <a:xfrm rot="0">
-            <a:off x="5693639" y="588142"/>
-            <a:ext cx="7730430" cy="1566544"/>
+            <a:off x="1737360" y="777240"/>
+            <a:ext cx="14813280" cy="1417320"/>
           </a:xfrm>
           <a:prstGeom prst="rect">
             <a:avLst/>
@@ -4975,7 +4975,7 @@
               </a:lnSpc>
             </a:pPr>
             <a:r>
-              <a:rPr lang="en-US" sz="9200" b="true">
+              <a:rPr lang="en-US" sz="6200" b="true">
                 <a:solidFill>
                   <a:srgbClr val="FFFFFF"/>
                 </a:solidFill>
@@ -5010,13 +5010,13 @@
           </a:bodyPr>
           <a:lstStyle/>
           <a:p>
-            <a:pPr algn="ctr">
+            <a:pPr algn="l">
               <a:lnSpc>
                 <a:spcPts val="8854"/>
               </a:lnSpc>
             </a:pPr>
             <a:r>
-              <a:rPr lang="en-US" b="true" sz="4449">
+              <a:rPr lang="en-US" b="true" sz="3000">
                 <a:solidFill>
                   <a:srgbClr val="FFFFFF"/>
                 </a:solidFill>
@@ -5046,8 +5046,8 @@
         </p:blipFill>
         <p:spPr>
           <a:xfrm>
-            <a:off x="2551761" y="4206240"/>
-            <a:ext cx="2577437" cy="5577840"/>
+            <a:off x="2615140" y="4526280"/>
+            <a:ext cx="2450678" cy="5303520"/>
           </a:xfrm>
           <a:prstGeom prst="rect">
             <a:avLst/>
@@ -5075,8 +5075,8 @@
         </p:blipFill>
         <p:spPr>
           <a:xfrm>
-            <a:off x="7855281" y="4206240"/>
-            <a:ext cx="2577437" cy="5577840"/>
+            <a:off x="7918660" y="4526280"/>
+            <a:ext cx="2450678" cy="5303520"/>
           </a:xfrm>
           <a:prstGeom prst="rect">
             <a:avLst/>
@@ -5104,7 +5104,7 @@
         </p:blipFill>
         <p:spPr>
           <a:xfrm>
-            <a:off x="11978640" y="4211954"/>
+            <a:off x="11978640" y="4541139"/>
             <a:ext cx="4937760" cy="2777490"/>
           </a:xfrm>
           <a:prstGeom prst="rect">
@@ -5365,8 +5365,8 @@
         </p:nvSpPr>
         <p:spPr>
           <a:xfrm rot="0">
-            <a:off x="5693639" y="588142"/>
-            <a:ext cx="7730430" cy="1566544"/>
+            <a:off x="1737360" y="777240"/>
+            <a:ext cx="14813280" cy="1417320"/>
           </a:xfrm>
           <a:prstGeom prst="rect">
             <a:avLst/>
@@ -5384,7 +5384,7 @@
               </a:lnSpc>
             </a:pPr>
             <a:r>
-              <a:rPr lang="en-US" sz="9200" b="true">
+              <a:rPr lang="en-US" sz="6200" b="true">
                 <a:solidFill>
                   <a:srgbClr val="FFFFFF"/>
                 </a:solidFill>
@@ -5406,8 +5406,8 @@
         </p:nvSpPr>
         <p:spPr>
           <a:xfrm rot="0">
-            <a:off x="1463040" y="3749039"/>
-            <a:ext cx="6949440" cy="2926080"/>
+            <a:off x="1737360" y="3017520"/>
+            <a:ext cx="7406640" cy="2377440"/>
           </a:xfrm>
           <a:prstGeom prst="rect">
             <a:avLst/>
@@ -5419,13 +5419,13 @@
           </a:bodyPr>
           <a:lstStyle/>
           <a:p>
-            <a:pPr algn="ctr">
+            <a:pPr algn="l">
               <a:lnSpc>
                 <a:spcPts val="8854"/>
               </a:lnSpc>
             </a:pPr>
             <a:r>
-              <a:rPr lang="en-US" b="true" sz="4449">
+              <a:rPr lang="en-US" b="true" sz="3000">
                 <a:solidFill>
                   <a:srgbClr val="FFFFFF"/>
                 </a:solidFill>
@@ -5455,8 +5455,8 @@
         </p:blipFill>
         <p:spPr>
           <a:xfrm>
-            <a:off x="10058400" y="4506439"/>
-            <a:ext cx="6949440" cy="3605841"/>
+            <a:off x="9784080" y="4458993"/>
+            <a:ext cx="7132320" cy="3700732"/>
           </a:xfrm>
           <a:prstGeom prst="rect">
             <a:avLst/>
@@ -5716,8 +5716,8 @@
         </p:nvSpPr>
         <p:spPr>
           <a:xfrm rot="0">
-            <a:off x="5693639" y="588142"/>
-            <a:ext cx="7730430" cy="1566544"/>
+            <a:off x="1737360" y="777240"/>
+            <a:ext cx="14813280" cy="1417320"/>
           </a:xfrm>
           <a:prstGeom prst="rect">
             <a:avLst/>
@@ -5735,7 +5735,7 @@
               </a:lnSpc>
             </a:pPr>
             <a:r>
-              <a:rPr lang="en-US" sz="9200" b="true">
+              <a:rPr lang="en-US" sz="6200" b="true">
                 <a:solidFill>
                   <a:srgbClr val="FFFFFF"/>
                 </a:solidFill>
@@ -5757,8 +5757,8 @@
         </p:nvSpPr>
         <p:spPr>
           <a:xfrm rot="0">
-            <a:off x="1463040" y="3749039"/>
-            <a:ext cx="6949440" cy="2926080"/>
+            <a:off x="1737360" y="3017520"/>
+            <a:ext cx="7406640" cy="2377440"/>
           </a:xfrm>
           <a:prstGeom prst="rect">
             <a:avLst/>
@@ -5770,13 +5770,13 @@
           </a:bodyPr>
           <a:lstStyle/>
           <a:p>
-            <a:pPr algn="ctr">
+            <a:pPr algn="l">
               <a:lnSpc>
                 <a:spcPts val="8854"/>
               </a:lnSpc>
             </a:pPr>
             <a:r>
-              <a:rPr lang="en-US" b="true" sz="4449">
+              <a:rPr lang="en-US" b="true" sz="3000">
                 <a:solidFill>
                   <a:srgbClr val="FFFFFF"/>
                 </a:solidFill>
@@ -5806,8 +5806,8 @@
         </p:blipFill>
         <p:spPr>
           <a:xfrm>
-            <a:off x="9692640" y="4590978"/>
-            <a:ext cx="7680960" cy="3985403"/>
+            <a:off x="11165433" y="3383280"/>
+            <a:ext cx="4369612" cy="5852160"/>
           </a:xfrm>
           <a:prstGeom prst="rect">
             <a:avLst/>
@@ -6067,8 +6067,8 @@
         </p:nvSpPr>
         <p:spPr>
           <a:xfrm rot="0">
-            <a:off x="5693639" y="588142"/>
-            <a:ext cx="7730430" cy="1566544"/>
+            <a:off x="1737360" y="777240"/>
+            <a:ext cx="14813280" cy="1417320"/>
           </a:xfrm>
           <a:prstGeom prst="rect">
             <a:avLst/>
@@ -6086,7 +6086,7 @@
               </a:lnSpc>
             </a:pPr>
             <a:r>
-              <a:rPr lang="en-US" sz="9200" b="true">
+              <a:rPr lang="en-US" sz="6200" b="true">
                 <a:solidFill>
                   <a:srgbClr val="FFFFFF"/>
                 </a:solidFill>
@@ -6108,8 +6108,8 @@
         </p:nvSpPr>
         <p:spPr>
           <a:xfrm rot="0">
-            <a:off x="1463040" y="3749039"/>
-            <a:ext cx="6949440" cy="2926080"/>
+            <a:off x="1737360" y="3017520"/>
+            <a:ext cx="7406640" cy="2377440"/>
           </a:xfrm>
           <a:prstGeom prst="rect">
             <a:avLst/>
@@ -6121,13 +6121,13 @@
           </a:bodyPr>
           <a:lstStyle/>
           <a:p>
-            <a:pPr algn="ctr">
+            <a:pPr algn="l">
               <a:lnSpc>
                 <a:spcPts val="8854"/>
               </a:lnSpc>
             </a:pPr>
             <a:r>
-              <a:rPr lang="en-US" b="true" sz="4449">
+              <a:rPr lang="en-US" b="true" sz="3000">
                 <a:solidFill>
                   <a:srgbClr val="FFFFFF"/>
                 </a:solidFill>
@@ -6157,8 +6157,8 @@
         </p:blipFill>
         <p:spPr>
           <a:xfrm>
-            <a:off x="13552621" y="3657600"/>
-            <a:ext cx="2704197" cy="5852160"/>
+            <a:off x="13053168" y="3291840"/>
+            <a:ext cx="2788703" cy="6035040"/>
           </a:xfrm>
           <a:prstGeom prst="rect">
             <a:avLst/>
@@ -6418,8 +6418,8 @@
         </p:nvSpPr>
         <p:spPr>
           <a:xfrm rot="0">
-            <a:off x="5693639" y="588142"/>
-            <a:ext cx="7730430" cy="1566544"/>
+            <a:off x="1737360" y="777240"/>
+            <a:ext cx="14813280" cy="1417320"/>
           </a:xfrm>
           <a:prstGeom prst="rect">
             <a:avLst/>
@@ -6437,7 +6437,7 @@
               </a:lnSpc>
             </a:pPr>
             <a:r>
-              <a:rPr lang="en-US" sz="9200" b="true">
+              <a:rPr lang="en-US" sz="6200" b="true">
                 <a:solidFill>
                   <a:srgbClr val="FFFFFF"/>
                 </a:solidFill>
@@ -6459,8 +6459,8 @@
         </p:nvSpPr>
         <p:spPr>
           <a:xfrm rot="0">
-            <a:off x="1463040" y="3749039"/>
-            <a:ext cx="6949440" cy="2926080"/>
+            <a:off x="1737360" y="3017520"/>
+            <a:ext cx="7406640" cy="2377440"/>
           </a:xfrm>
           <a:prstGeom prst="rect">
             <a:avLst/>
@@ -6472,13 +6472,13 @@
           </a:bodyPr>
           <a:lstStyle/>
           <a:p>
-            <a:pPr algn="ctr">
+            <a:pPr algn="l">
               <a:lnSpc>
                 <a:spcPts val="8854"/>
               </a:lnSpc>
             </a:pPr>
             <a:r>
-              <a:rPr lang="en-US" b="true" sz="4449">
+              <a:rPr lang="en-US" b="true" sz="3000">
                 <a:solidFill>
                   <a:srgbClr val="FFFFFF"/>
                 </a:solidFill>
@@ -6508,7 +6508,7 @@
         </p:blipFill>
         <p:spPr>
           <a:xfrm>
-            <a:off x="9956800" y="3657600"/>
+            <a:off x="9819639" y="3383280"/>
             <a:ext cx="7152640" cy="5852160"/>
           </a:xfrm>
           <a:prstGeom prst="rect">
@@ -6769,8 +6769,8 @@
         </p:nvSpPr>
         <p:spPr>
           <a:xfrm rot="0">
-            <a:off x="5693639" y="588142"/>
-            <a:ext cx="7730430" cy="1566544"/>
+            <a:off x="1737360" y="777240"/>
+            <a:ext cx="14813280" cy="1417320"/>
           </a:xfrm>
           <a:prstGeom prst="rect">
             <a:avLst/>
@@ -6788,7 +6788,7 @@
               </a:lnSpc>
             </a:pPr>
             <a:r>
-              <a:rPr lang="en-US" sz="9200" b="true">
+              <a:rPr lang="en-US" sz="6200" b="true">
                 <a:solidFill>
                   <a:srgbClr val="FFFFFF"/>
                 </a:solidFill>
@@ -6810,8 +6810,8 @@
         </p:nvSpPr>
         <p:spPr>
           <a:xfrm rot="0">
-            <a:off x="1463040" y="3749039"/>
-            <a:ext cx="6949440" cy="2926080"/>
+            <a:off x="1737360" y="3017520"/>
+            <a:ext cx="7406640" cy="2377440"/>
           </a:xfrm>
           <a:prstGeom prst="rect">
             <a:avLst/>
@@ -6823,13 +6823,13 @@
           </a:bodyPr>
           <a:lstStyle/>
           <a:p>
-            <a:pPr algn="ctr">
+            <a:pPr algn="l">
               <a:lnSpc>
                 <a:spcPts val="8854"/>
               </a:lnSpc>
             </a:pPr>
             <a:r>
-              <a:rPr lang="en-US" b="true" sz="4449">
+              <a:rPr lang="en-US" b="true" sz="3000">
                 <a:solidFill>
                   <a:srgbClr val="FFFFFF"/>
                 </a:solidFill>
@@ -6859,8 +6859,8 @@
         </p:blipFill>
         <p:spPr>
           <a:xfrm>
-            <a:off x="13552621" y="3657600"/>
-            <a:ext cx="2704197" cy="5852160"/>
+            <a:off x="13053168" y="3291840"/>
+            <a:ext cx="2788703" cy="6035040"/>
           </a:xfrm>
           <a:prstGeom prst="rect">
             <a:avLst/>
@@ -7120,8 +7120,8 @@
         </p:nvSpPr>
         <p:spPr>
           <a:xfrm rot="0">
-            <a:off x="5693639" y="588142"/>
-            <a:ext cx="7730430" cy="1566544"/>
+            <a:off x="1737360" y="777240"/>
+            <a:ext cx="14813280" cy="1417320"/>
           </a:xfrm>
           <a:prstGeom prst="rect">
             <a:avLst/>
@@ -7139,7 +7139,7 @@
               </a:lnSpc>
             </a:pPr>
             <a:r>
-              <a:rPr lang="en-US" sz="9200" b="true">
+              <a:rPr lang="en-US" sz="6200" b="true">
                 <a:solidFill>
                   <a:srgbClr val="FFFFFF"/>
                 </a:solidFill>
@@ -7161,8 +7161,8 @@
         </p:nvSpPr>
         <p:spPr>
           <a:xfrm rot="0">
-            <a:off x="1463040" y="3749039"/>
-            <a:ext cx="6949440" cy="2926080"/>
+            <a:off x="1737360" y="3017520"/>
+            <a:ext cx="7406640" cy="2377440"/>
           </a:xfrm>
           <a:prstGeom prst="rect">
             <a:avLst/>
@@ -7174,13 +7174,13 @@
           </a:bodyPr>
           <a:lstStyle/>
           <a:p>
-            <a:pPr algn="ctr">
+            <a:pPr algn="l">
               <a:lnSpc>
                 <a:spcPts val="8854"/>
               </a:lnSpc>
             </a:pPr>
             <a:r>
-              <a:rPr lang="en-US" b="true" sz="4449">
+              <a:rPr lang="en-US" b="true" sz="3000">
                 <a:solidFill>
                   <a:srgbClr val="FFFFFF"/>
                 </a:solidFill>
@@ -7210,8 +7210,8 @@
         </p:blipFill>
         <p:spPr>
           <a:xfrm>
-            <a:off x="9692640" y="5159188"/>
-            <a:ext cx="7680960" cy="2848983"/>
+            <a:off x="9784080" y="4969659"/>
+            <a:ext cx="7223760" cy="2679401"/>
           </a:xfrm>
           <a:prstGeom prst="rect">
             <a:avLst/>
@@ -7471,8 +7471,8 @@
         </p:nvSpPr>
         <p:spPr>
           <a:xfrm rot="0">
-            <a:off x="5693639" y="588142"/>
-            <a:ext cx="7730430" cy="1566544"/>
+            <a:off x="1737360" y="777240"/>
+            <a:ext cx="14813280" cy="1417320"/>
           </a:xfrm>
           <a:prstGeom prst="rect">
             <a:avLst/>
@@ -7490,7 +7490,7 @@
               </a:lnSpc>
             </a:pPr>
             <a:r>
-              <a:rPr lang="en-US" sz="9200" b="true">
+              <a:rPr lang="en-US" sz="6200" b="true">
                 <a:solidFill>
                   <a:srgbClr val="FFFFFF"/>
                 </a:solidFill>
@@ -7512,8 +7512,8 @@
         </p:nvSpPr>
         <p:spPr>
           <a:xfrm rot="0">
-            <a:off x="1463040" y="3749039"/>
-            <a:ext cx="6949440" cy="2926080"/>
+            <a:off x="1737360" y="3017520"/>
+            <a:ext cx="7406640" cy="2377440"/>
           </a:xfrm>
           <a:prstGeom prst="rect">
             <a:avLst/>
@@ -7525,13 +7525,13 @@
           </a:bodyPr>
           <a:lstStyle/>
           <a:p>
-            <a:pPr algn="ctr">
+            <a:pPr algn="l">
               <a:lnSpc>
                 <a:spcPts val="8854"/>
               </a:lnSpc>
             </a:pPr>
             <a:r>
-              <a:rPr lang="en-US" b="true" sz="4449">
+              <a:rPr lang="en-US" b="true" sz="3000">
                 <a:solidFill>
                   <a:srgbClr val="FFFFFF"/>
                 </a:solidFill>
@@ -7561,8 +7561,8 @@
         </p:blipFill>
         <p:spPr>
           <a:xfrm>
-            <a:off x="9885679" y="3657600"/>
-            <a:ext cx="6929120" cy="5669280"/>
+            <a:off x="9784080" y="4277677"/>
+            <a:ext cx="7223760" cy="4063365"/>
           </a:xfrm>
           <a:prstGeom prst="rect">
             <a:avLst/>
@@ -7937,8 +7937,8 @@
         </p:nvSpPr>
         <p:spPr>
           <a:xfrm rot="0">
-            <a:off x="3164434" y="923658"/>
-            <a:ext cx="8925223" cy="815035"/>
+            <a:off x="4754880" y="457200"/>
+            <a:ext cx="8778240" cy="868680"/>
           </a:xfrm>
           <a:prstGeom prst="rect">
             <a:avLst/>
@@ -9544,8 +9544,8 @@
         </p:nvSpPr>
         <p:spPr>
           <a:xfrm rot="0">
-            <a:off x="7828749" y="2463991"/>
-            <a:ext cx="1470496" cy="500831"/>
+            <a:off x="7827264" y="2459736"/>
+            <a:ext cx="3108960" cy="502920"/>
           </a:xfrm>
           <a:prstGeom prst="rect">
             <a:avLst/>
@@ -9588,8 +9588,8 @@
         </p:nvSpPr>
         <p:spPr>
           <a:xfrm rot="0">
-            <a:off x="7828749" y="3450066"/>
-            <a:ext cx="2228327" cy="500831"/>
+            <a:off x="7827264" y="3447288"/>
+            <a:ext cx="3108960" cy="502920"/>
           </a:xfrm>
           <a:prstGeom prst="rect">
             <a:avLst/>
@@ -9632,8 +9632,8 @@
         </p:nvSpPr>
         <p:spPr>
           <a:xfrm rot="0">
-            <a:off x="7828749" y="4321845"/>
-            <a:ext cx="1063903" cy="500831"/>
+            <a:off x="7827264" y="4325112"/>
+            <a:ext cx="3108960" cy="502920"/>
           </a:xfrm>
           <a:prstGeom prst="rect">
             <a:avLst/>
@@ -9676,8 +9676,8 @@
         </p:nvSpPr>
         <p:spPr>
           <a:xfrm rot="0">
-            <a:off x="7828749" y="5194151"/>
-            <a:ext cx="1692183" cy="500831"/>
+            <a:off x="7827264" y="5193792"/>
+            <a:ext cx="3108960" cy="502920"/>
           </a:xfrm>
           <a:prstGeom prst="rect">
             <a:avLst/>
@@ -9720,8 +9720,8 @@
         </p:nvSpPr>
         <p:spPr>
           <a:xfrm rot="0">
-            <a:off x="7828749" y="6066457"/>
-            <a:ext cx="2144123" cy="500831"/>
+            <a:off x="7827264" y="6062472"/>
+            <a:ext cx="3108960" cy="502920"/>
           </a:xfrm>
           <a:prstGeom prst="rect">
             <a:avLst/>
@@ -9764,8 +9764,8 @@
         </p:nvSpPr>
         <p:spPr>
           <a:xfrm rot="0">
-            <a:off x="7827577" y="6938236"/>
-            <a:ext cx="1472840" cy="500831"/>
+            <a:off x="7827264" y="6940296"/>
+            <a:ext cx="3108960" cy="502920"/>
           </a:xfrm>
           <a:prstGeom prst="rect">
             <a:avLst/>
@@ -9808,8 +9808,8 @@
         </p:nvSpPr>
         <p:spPr>
           <a:xfrm rot="0">
-            <a:off x="7828749" y="7810541"/>
-            <a:ext cx="1240333" cy="500831"/>
+            <a:off x="7827264" y="7808975"/>
+            <a:ext cx="3108960" cy="502920"/>
           </a:xfrm>
           <a:prstGeom prst="rect">
             <a:avLst/>
@@ -9852,8 +9852,8 @@
         </p:nvSpPr>
         <p:spPr>
           <a:xfrm rot="0">
-            <a:off x="7772718" y="8795750"/>
-            <a:ext cx="1170194" cy="500831"/>
+            <a:off x="7827264" y="8796528"/>
+            <a:ext cx="3108960" cy="502920"/>
           </a:xfrm>
           <a:prstGeom prst="rect">
             <a:avLst/>
@@ -10453,8 +10453,8 @@
         </p:nvSpPr>
         <p:spPr>
           <a:xfrm rot="0">
-            <a:off x="1738788" y="1632536"/>
-            <a:ext cx="2416522" cy="640334"/>
+            <a:off x="1737360" y="1417320"/>
+            <a:ext cx="4754880" cy="731520"/>
           </a:xfrm>
           <a:prstGeom prst="rect">
             <a:avLst/>
@@ -10497,8 +10497,8 @@
         </p:nvSpPr>
         <p:spPr>
           <a:xfrm rot="0">
-            <a:off x="1819601" y="2404710"/>
-            <a:ext cx="6557962" cy="950976"/>
+            <a:off x="1737360" y="2377440"/>
+            <a:ext cx="7315200" cy="1005840"/>
           </a:xfrm>
           <a:prstGeom prst="rect">
             <a:avLst/>
@@ -10553,8 +10553,8 @@
         </p:nvSpPr>
         <p:spPr>
           <a:xfrm rot="0">
-            <a:off x="1970316" y="5475732"/>
-            <a:ext cx="5498825" cy="961213"/>
+            <a:off x="1737360" y="5394960"/>
+            <a:ext cx="7315200" cy="1005840"/>
           </a:xfrm>
           <a:prstGeom prst="rect">
             <a:avLst/>
@@ -10609,8 +10609,8 @@
         </p:nvSpPr>
         <p:spPr>
           <a:xfrm rot="0">
-            <a:off x="1355487" y="6903339"/>
-            <a:ext cx="6728483" cy="1383411"/>
+            <a:off x="1737360" y="6583680"/>
+            <a:ext cx="7315200" cy="1371600"/>
           </a:xfrm>
           <a:prstGeom prst="rect">
             <a:avLst/>
@@ -10665,8 +10665,8 @@
         </p:nvSpPr>
         <p:spPr>
           <a:xfrm rot="0">
-            <a:off x="9351162" y="4577525"/>
-            <a:ext cx="6921401" cy="950976"/>
+            <a:off x="9354312" y="5394960"/>
+            <a:ext cx="7315200" cy="1005840"/>
           </a:xfrm>
           <a:prstGeom prst="rect">
             <a:avLst/>
@@ -11057,8 +11057,8 @@
         </p:nvSpPr>
         <p:spPr>
           <a:xfrm rot="0">
-            <a:off x="3564674" y="2328396"/>
-            <a:ext cx="10581144" cy="6189267"/>
+            <a:off x="3566160" y="2651760"/>
+            <a:ext cx="11155680" cy="3840480"/>
           </a:xfrm>
           <a:prstGeom prst="rect">
             <a:avLst/>
@@ -11280,7 +11280,7 @@
               </a:lnSpc>
             </a:pPr>
             <a:r>
-              <a:rPr lang="en-US" sz="9200" b="true">
+              <a:rPr lang="en-US" sz="6200" b="true">
                 <a:solidFill>
                   <a:srgbClr val="FFFFFF"/>
                 </a:solidFill>
@@ -11542,8 +11542,8 @@
         </p:nvSpPr>
         <p:spPr>
           <a:xfrm rot="0">
-            <a:off x="2448088" y="3192048"/>
-            <a:ext cx="12629093" cy="4240911"/>
+            <a:off x="2450592" y="3291840"/>
+            <a:ext cx="13350240" cy="2743200"/>
           </a:xfrm>
           <a:prstGeom prst="rect">
             <a:avLst/>
@@ -11618,8 +11618,8 @@
         </p:nvSpPr>
         <p:spPr>
           <a:xfrm rot="0">
-            <a:off x="5246666" y="588142"/>
-            <a:ext cx="4968032" cy="2319655"/>
+            <a:off x="4114800" y="585216"/>
+            <a:ext cx="10058400" cy="2322576"/>
           </a:xfrm>
           <a:prstGeom prst="rect">
             <a:avLst/>
@@ -11637,7 +11637,7 @@
               </a:lnSpc>
             </a:pPr>
             <a:r>
-              <a:rPr lang="en-US" sz="9200" b="true">
+              <a:rPr lang="en-US" sz="6200" b="true">
                 <a:solidFill>
                   <a:srgbClr val="FFFFFF"/>
                 </a:solidFill>
@@ -11734,8 +11734,8 @@
         </p:nvSpPr>
         <p:spPr>
           <a:xfrm rot="0">
-            <a:off x="1028700" y="3123720"/>
-            <a:ext cx="13060189" cy="6134580"/>
+            <a:off x="1737360" y="3108960"/>
+            <a:ext cx="13057632" cy="4572000"/>
           </a:xfrm>
           <a:prstGeom prst="rect">
             <a:avLst/>
@@ -11862,8 +11862,8 @@
         </p:nvSpPr>
         <p:spPr>
           <a:xfrm rot="0">
-            <a:off x="5747660" y="1700051"/>
-            <a:ext cx="8072735" cy="1566544"/>
+            <a:off x="1737360" y="1005840"/>
+            <a:ext cx="14813280" cy="1188720"/>
           </a:xfrm>
           <a:prstGeom prst="rect">
             <a:avLst/>
@@ -11881,7 +11881,7 @@
               </a:lnSpc>
             </a:pPr>
             <a:r>
-              <a:rPr lang="en-US" sz="9200" b="true">
+              <a:rPr lang="en-US" sz="6200" b="true">
                 <a:solidFill>
                   <a:srgbClr val="FFFFFF"/>
                 </a:solidFill>
@@ -12299,8 +12299,8 @@
         </p:nvSpPr>
         <p:spPr>
           <a:xfrm rot="0">
-            <a:off x="5693639" y="588142"/>
-            <a:ext cx="7730430" cy="1566544"/>
+            <a:off x="1737360" y="1005840"/>
+            <a:ext cx="14813280" cy="1188720"/>
           </a:xfrm>
           <a:prstGeom prst="rect">
             <a:avLst/>
@@ -12318,7 +12318,7 @@
               </a:lnSpc>
             </a:pPr>
             <a:r>
-              <a:rPr lang="en-US" sz="9200" b="true">
+              <a:rPr lang="en-US" sz="6200" b="true">
                 <a:solidFill>
                   <a:srgbClr val="FFFFFF"/>
                 </a:solidFill>
@@ -12340,8 +12340,8 @@
         </p:nvSpPr>
         <p:spPr>
           <a:xfrm rot="0">
-            <a:off x="2432178" y="3595448"/>
-            <a:ext cx="14167240" cy="3249307"/>
+            <a:off x="2432304" y="3291840"/>
+            <a:ext cx="14164056" cy="2377440"/>
           </a:xfrm>
           <a:prstGeom prst="rect">
             <a:avLst/>
@@ -12621,8 +12621,8 @@
         </p:nvSpPr>
         <p:spPr>
           <a:xfrm rot="0">
-            <a:off x="3982269" y="409575"/>
-            <a:ext cx="10323463" cy="1566544"/>
+            <a:off x="1737360" y="731520"/>
+            <a:ext cx="14813280" cy="1188720"/>
           </a:xfrm>
           <a:prstGeom prst="rect">
             <a:avLst/>
@@ -12640,7 +12640,7 @@
               </a:lnSpc>
             </a:pPr>
             <a:r>
-              <a:rPr lang="en-US" sz="9200" b="true">
+              <a:rPr lang="en-US" sz="6200" b="true">
                 <a:solidFill>
                   <a:srgbClr val="FFFFFF"/>
                 </a:solidFill>
@@ -12662,8 +12662,8 @@
         </p:nvSpPr>
         <p:spPr>
           <a:xfrm rot="0">
-            <a:off x="1596707" y="8506460"/>
-            <a:ext cx="10751592" cy="1780540"/>
+            <a:off x="3291840" y="8046720"/>
+            <a:ext cx="11887200" cy="1280160"/>
           </a:xfrm>
           <a:prstGeom prst="rect">
             <a:avLst/>
@@ -12728,8 +12728,71 @@
         </p:nvSpPr>
         <p:spPr>
           <a:xfrm rot="0">
-            <a:off x="10276782" y="3270101"/>
-            <a:ext cx="6894110" cy="1180465"/>
+            <a:off x="5120640" y="4892040"/>
+            <a:ext cx="10058400" cy="868680"/>
+          </a:xfrm>
+          <a:prstGeom prst="rect">
+            <a:avLst/>
+          </a:prstGeom>
+        </p:spPr>
+        <p:txBody>
+          <a:bodyPr anchor="t" rtlCol="false" tIns="0" lIns="0" bIns="0" rIns="0">
+            <a:spAutoFit/>
+          </a:bodyPr>
+          <a:lstStyle/>
+          <a:p>
+            <a:pPr algn="l">
+              <a:lnSpc>
+                <a:spcPts val="4759"/>
+              </a:lnSpc>
+            </a:pPr>
+            <a:r>
+              <a:rPr lang="en-US" sz="3399">
+                <a:solidFill>
+                  <a:srgbClr val="FFFFFF"/>
+                </a:solidFill>
+                <a:latin typeface="Open Sans"/>
+                <a:ea typeface="Open Sans"/>
+                <a:cs typeface="Open Sans"/>
+                <a:sym typeface="Open Sans"/>
+              </a:rPr>
+              <a:t/>
+            </a:r>
+          </a:p>
+          <a:p>
+            <a:pPr algn="l">
+              <a:lnSpc>
+                <a:spcPts val="4759"/>
+              </a:lnSpc>
+              <a:spcBef>
+                <a:spcPct val="0"/>
+              </a:spcBef>
+            </a:pPr>
+            <a:r>
+              <a:rPr lang="en-US" sz="3399">
+                <a:solidFill>
+                  <a:srgbClr val="FFFFFF"/>
+                </a:solidFill>
+                <a:latin typeface="Open Sans"/>
+                <a:ea typeface="Open Sans"/>
+                <a:cs typeface="Open Sans"/>
+                <a:sym typeface="Open Sans"/>
+              </a:rPr>
+              <a:t>🎯 Pedidos automatizados</a:t>
+            </a:r>
+          </a:p>
+        </p:txBody>
+      </p:sp>
+      <p:sp>
+        <p:nvSpPr>
+          <p:cNvPr name="TextBox 9" id="9"/>
+          <p:cNvSpPr txBox="true"/>
+          <p:nvPr/>
+        </p:nvSpPr>
+        <p:spPr>
+          <a:xfrm rot="0">
+            <a:off x="10276782" y="5662925"/>
+            <a:ext cx="6894110" cy="1780540"/>
           </a:xfrm>
           <a:prstGeom prst="rect">
             <a:avLst/>
@@ -12768,31 +12831,19 @@
                 <a:spcPct val="0"/>
               </a:spcBef>
             </a:pPr>
-            <a:r>
-              <a:rPr lang="en-US" sz="3399">
-                <a:solidFill>
-                  <a:srgbClr val="FFFFFF"/>
-                </a:solidFill>
-                <a:latin typeface="Open Sans"/>
-                <a:ea typeface="Open Sans"/>
-                <a:cs typeface="Open Sans"/>
-                <a:sym typeface="Open Sans"/>
-              </a:rPr>
-              <a:t>🎯 Pedidos automatizados</a:t>
-            </a:r>
-          </a:p>
-        </p:txBody>
-      </p:sp>
-      <p:sp>
-        <p:nvSpPr>
-          <p:cNvPr name="TextBox 9" id="9"/>
+          </a:p>
+        </p:txBody>
+      </p:sp>
+      <p:sp>
+        <p:nvSpPr>
+          <p:cNvPr name="TextBox 10" id="10"/>
           <p:cNvSpPr txBox="true"/>
           <p:nvPr/>
         </p:nvSpPr>
         <p:spPr>
           <a:xfrm rot="0">
-            <a:off x="10276782" y="5662925"/>
-            <a:ext cx="6894110" cy="1780540"/>
+            <a:off x="5120640" y="6309360"/>
+            <a:ext cx="10058400" cy="868680"/>
           </a:xfrm>
           <a:prstGeom prst="rect">
             <a:avLst/>
@@ -12804,26 +12855,7 @@
           </a:bodyPr>
           <a:lstStyle/>
           <a:p>
-            <a:pPr algn="ctr">
-              <a:lnSpc>
-                <a:spcPts val="4759"/>
-              </a:lnSpc>
-            </a:pPr>
-            <a:r>
-              <a:rPr lang="en-US" sz="3399">
-                <a:solidFill>
-                  <a:srgbClr val="FFFFFF"/>
-                </a:solidFill>
-                <a:latin typeface="Open Sans"/>
-                <a:ea typeface="Open Sans"/>
-                <a:cs typeface="Open Sans"/>
-                <a:sym typeface="Open Sans"/>
-              </a:rPr>
-              <a:t/>
-            </a:r>
-          </a:p>
-          <a:p>
-            <a:pPr algn="ctr">
+            <a:pPr algn="l">
               <a:lnSpc>
                 <a:spcPts val="4759"/>
               </a:lnSpc>
@@ -12831,38 +12863,6 @@
                 <a:spcPct val="0"/>
               </a:spcBef>
             </a:pPr>
-          </a:p>
-        </p:txBody>
-      </p:sp>
-      <p:sp>
-        <p:nvSpPr>
-          <p:cNvPr name="TextBox 10" id="10"/>
-          <p:cNvSpPr txBox="true"/>
-          <p:nvPr/>
-        </p:nvSpPr>
-        <p:spPr>
-          <a:xfrm rot="0">
-            <a:off x="1956046" y="5744696"/>
-            <a:ext cx="6894110" cy="1180465"/>
-          </a:xfrm>
-          <a:prstGeom prst="rect">
-            <a:avLst/>
-          </a:prstGeom>
-        </p:spPr>
-        <p:txBody>
-          <a:bodyPr anchor="t" rtlCol="false" tIns="0" lIns="0" bIns="0" rIns="0">
-            <a:spAutoFit/>
-          </a:bodyPr>
-          <a:lstStyle/>
-          <a:p>
-            <a:pPr algn="ctr">
-              <a:lnSpc>
-                <a:spcPts val="4759"/>
-              </a:lnSpc>
-              <a:spcBef>
-                <a:spcPct val="0"/>
-              </a:spcBef>
-            </a:pPr>
             <a:r>
               <a:rPr lang="en-US" sz="3399">
                 <a:solidFill>
@@ -12886,8 +12886,8 @@
         </p:nvSpPr>
         <p:spPr>
           <a:xfrm rot="0">
-            <a:off x="2315384" y="3511192"/>
-            <a:ext cx="4602735" cy="688758"/>
+            <a:off x="5120640" y="3474720"/>
+            <a:ext cx="10058400" cy="868680"/>
           </a:xfrm>
           <a:prstGeom prst="rect">
             <a:avLst/>
@@ -12899,7 +12899,7 @@
           </a:bodyPr>
           <a:lstStyle/>
           <a:p>
-            <a:pPr algn="ctr">
+            <a:pPr algn="l">
               <a:lnSpc>
                 <a:spcPts val="5675"/>
               </a:lnSpc>
@@ -12908,7 +12908,7 @@
               </a:spcBef>
             </a:pPr>
             <a:r>
-              <a:rPr lang="en-US" sz="4054">
+              <a:rPr lang="en-US" sz="3300">
                 <a:solidFill>
                   <a:srgbClr val="FFFFFF"/>
                 </a:solidFill>

--- a/fadori/presentacion/Fadori-STEAM.pptx
+++ b/fadori/presentacion/Fadori-STEAM.pptx
@@ -4695,8 +4695,8 @@
         </p:blipFill>
         <p:spPr>
           <a:xfrm>
-            <a:off x="12230208" y="3291840"/>
-            <a:ext cx="2788703" cy="6035040"/>
+            <a:off x="11624992" y="3154680"/>
+            <a:ext cx="3999135" cy="6400800"/>
           </a:xfrm>
           <a:prstGeom prst="rect">
             <a:avLst/>
@@ -5046,8 +5046,8 @@
         </p:blipFill>
         <p:spPr>
           <a:xfrm>
-            <a:off x="2615140" y="4526280"/>
-            <a:ext cx="2450678" cy="5303520"/>
+            <a:off x="2194560" y="4626015"/>
+            <a:ext cx="3108960" cy="4976033"/>
           </a:xfrm>
           <a:prstGeom prst="rect">
             <a:avLst/>
@@ -5075,8 +5075,8 @@
         </p:blipFill>
         <p:spPr>
           <a:xfrm>
-            <a:off x="7918660" y="4526280"/>
-            <a:ext cx="2450678" cy="5303520"/>
+            <a:off x="6767552" y="4480560"/>
+            <a:ext cx="4021374" cy="4398264"/>
           </a:xfrm>
           <a:prstGeom prst="rect">
             <a:avLst/>
@@ -5104,8 +5104,8 @@
         </p:blipFill>
         <p:spPr>
           <a:xfrm>
-            <a:off x="11978640" y="4541139"/>
-            <a:ext cx="4937760" cy="2777490"/>
+            <a:off x="11704320" y="4480560"/>
+            <a:ext cx="5120640" cy="2880360"/>
           </a:xfrm>
           <a:prstGeom prst="rect">
             <a:avLst/>
@@ -5455,8 +5455,8 @@
         </p:blipFill>
         <p:spPr>
           <a:xfrm>
-            <a:off x="9784080" y="4458993"/>
-            <a:ext cx="7132320" cy="3700732"/>
+            <a:off x="9692640" y="4041858"/>
+            <a:ext cx="7315200" cy="3712043"/>
           </a:xfrm>
           <a:prstGeom prst="rect">
             <a:avLst/>
@@ -5806,8 +5806,8 @@
         </p:blipFill>
         <p:spPr>
           <a:xfrm>
-            <a:off x="11165433" y="3383280"/>
-            <a:ext cx="4369612" cy="5852160"/>
+            <a:off x="9693471" y="4023360"/>
+            <a:ext cx="7313537" cy="3794760"/>
           </a:xfrm>
           <a:prstGeom prst="rect">
             <a:avLst/>
@@ -6157,8 +6157,8 @@
         </p:blipFill>
         <p:spPr>
           <a:xfrm>
-            <a:off x="13053168" y="3291840"/>
-            <a:ext cx="2788703" cy="6035040"/>
+            <a:off x="11795760" y="3297622"/>
+            <a:ext cx="4754880" cy="5200514"/>
           </a:xfrm>
           <a:prstGeom prst="rect">
             <a:avLst/>
@@ -6508,8 +6508,8 @@
         </p:blipFill>
         <p:spPr>
           <a:xfrm>
-            <a:off x="9819639" y="3383280"/>
-            <a:ext cx="7152640" cy="5852160"/>
+            <a:off x="9601200" y="4116046"/>
+            <a:ext cx="7498079" cy="3179618"/>
           </a:xfrm>
           <a:prstGeom prst="rect">
             <a:avLst/>
@@ -6859,8 +6859,8 @@
         </p:blipFill>
         <p:spPr>
           <a:xfrm>
-            <a:off x="13053168" y="3291840"/>
-            <a:ext cx="2788703" cy="6035040"/>
+            <a:off x="11436002" y="3291840"/>
+            <a:ext cx="5108634" cy="5029200"/>
           </a:xfrm>
           <a:prstGeom prst="rect">
             <a:avLst/>
@@ -7210,8 +7210,8 @@
         </p:blipFill>
         <p:spPr>
           <a:xfrm>
-            <a:off x="9784080" y="4969659"/>
-            <a:ext cx="7223760" cy="2679401"/>
+            <a:off x="9692640" y="4221181"/>
+            <a:ext cx="7315200" cy="2713317"/>
           </a:xfrm>
           <a:prstGeom prst="rect">
             <a:avLst/>
@@ -7561,8 +7561,8 @@
         </p:blipFill>
         <p:spPr>
           <a:xfrm>
-            <a:off x="9784080" y="4277677"/>
-            <a:ext cx="7223760" cy="4063365"/>
+            <a:off x="9692640" y="3931920"/>
+            <a:ext cx="7315200" cy="4114800"/>
           </a:xfrm>
           <a:prstGeom prst="rect">
             <a:avLst/>
